--- a/dist/초2/수학/도형과측정/초2_수학_도형과측정_02_쌓기나무.pptx
+++ b/dist/초2/수학/도형과측정/초2_수학_도형과측정_02_쌓기나무.pptx
@@ -120,13 +120,13 @@
   <p:extLst>
     <p:ext uri="{521415D9-36F7-43E2-AB2F-B90AF26B5E84}">
       <p14:sectionLst xmlns:p14="http://schemas.microsoft.com/office/powerpoint/2010/main">
-        <p14:section name="도입" id="{cdf66712-8247-8108-ed82-5a9e91b210c7}">
+        <p14:section name="도입" id="{c1d763f2-c3bb-d35a-8f43-5c2c51debfdc}">
           <p14:sldIdLst>
             <p14:sldId id="256"/>
             <p14:sldId id="257"/>
           </p14:sldIdLst>
         </p14:section>
-        <p14:section name="개념" id="{2977ee7a-d19b-9002-265b-f14553ef9c6d}">
+        <p14:section name="개념" id="{d97c7e1f-9d83-df6a-30fd-d4bf30113aa4}">
           <p14:sldIdLst>
             <p14:sldId id="258"/>
             <p14:sldId id="259"/>
@@ -134,26 +134,26 @@
             <p14:sldId id="261"/>
           </p14:sldIdLst>
         </p14:section>
-        <p14:section name="연습" id="{6ef06881-e8d1-e810-85fe-53cfe0ebe104}">
+        <p14:section name="연습" id="{e77c9122-3ff3-9a0a-8803-c2bdedc85910}">
           <p14:sldIdLst>
             <p14:sldId id="262"/>
             <p14:sldId id="263"/>
             <p14:sldId id="264"/>
           </p14:sldIdLst>
         </p14:section>
-        <p14:section name="확인" id="{454567ef-37f7-4d76-d4e3-53856814f9d9}">
+        <p14:section name="확인" id="{cfdd68f1-7d2f-3aba-28a3-d1160ec41105}">
           <p14:sldIdLst>
             <p14:sldId id="265"/>
             <p14:sldId id="266"/>
             <p14:sldId id="267"/>
           </p14:sldIdLst>
         </p14:section>
-        <p14:section name="정리" id="{7713ba97-1b1c-1f9e-a9b4-5f543e08b2ab}">
+        <p14:section name="정리" id="{8c3b2c7f-79eb-1a19-69cd-c3a17a8b69e6}">
           <p14:sldIdLst>
             <p14:sldId id="268"/>
           </p14:sldIdLst>
         </p14:section>
-        <p14:section name="보충" id="{49ba7838-e58d-886b-39da-eec537f45280}">
+        <p14:section name="보충" id="{c9224688-fec3-1fe5-a79f-e4f7239544b2}">
           <p14:sldIdLst>
             <p14:sldId id="269"/>
           </p14:sldIdLst>
@@ -6617,7 +6617,7 @@
         </p:nvSpPr>
         <p:spPr>
           <a:xfrm>
-            <a:off x="2875788" y="2011680"/>
+            <a:off x="3515868" y="2011680"/>
             <a:ext cx="1143000" cy="1143000"/>
           </a:xfrm>
           <a:prstGeom prst="rect">
@@ -6689,7 +6689,7 @@
         </p:nvSpPr>
         <p:spPr>
           <a:xfrm>
-            <a:off x="2875788" y="3526675"/>
+            <a:off x="3515868" y="3526675"/>
             <a:ext cx="1143000" cy="1039091"/>
           </a:xfrm>
           <a:prstGeom prst="triangle">

--- a/dist/초2/수학/도형과측정/초2_수학_도형과측정_02_쌓기나무.pptx
+++ b/dist/초2/수학/도형과측정/초2_수학_도형과측정_02_쌓기나무.pptx
@@ -120,13 +120,13 @@
   <p:extLst>
     <p:ext uri="{521415D9-36F7-43E2-AB2F-B90AF26B5E84}">
       <p14:sectionLst xmlns:p14="http://schemas.microsoft.com/office/powerpoint/2010/main">
-        <p14:section name="도입" id="{c1d763f2-c3bb-d35a-8f43-5c2c51debfdc}">
+        <p14:section name="도입" id="{965e9748-88e0-539b-2379-1da678f1863e}">
           <p14:sldIdLst>
             <p14:sldId id="256"/>
             <p14:sldId id="257"/>
           </p14:sldIdLst>
         </p14:section>
-        <p14:section name="개념" id="{d97c7e1f-9d83-df6a-30fd-d4bf30113aa4}">
+        <p14:section name="개념" id="{9a08d4fa-a50f-1e71-4d0d-f52008791f0f}">
           <p14:sldIdLst>
             <p14:sldId id="258"/>
             <p14:sldId id="259"/>
@@ -134,26 +134,26 @@
             <p14:sldId id="261"/>
           </p14:sldIdLst>
         </p14:section>
-        <p14:section name="연습" id="{e77c9122-3ff3-9a0a-8803-c2bdedc85910}">
+        <p14:section name="연습" id="{1244dd31-c06c-33c8-aa52-210688b200c0}">
           <p14:sldIdLst>
             <p14:sldId id="262"/>
             <p14:sldId id="263"/>
             <p14:sldId id="264"/>
           </p14:sldIdLst>
         </p14:section>
-        <p14:section name="확인" id="{cfdd68f1-7d2f-3aba-28a3-d1160ec41105}">
+        <p14:section name="확인" id="{4fb76e86-c92d-0660-d33c-eba81c1aed36}">
           <p14:sldIdLst>
             <p14:sldId id="265"/>
             <p14:sldId id="266"/>
             <p14:sldId id="267"/>
           </p14:sldIdLst>
         </p14:section>
-        <p14:section name="정리" id="{8c3b2c7f-79eb-1a19-69cd-c3a17a8b69e6}">
+        <p14:section name="정리" id="{a1837dc7-4d53-0a5e-dcb5-53cb25e0ebd9}">
           <p14:sldIdLst>
             <p14:sldId id="268"/>
           </p14:sldIdLst>
         </p14:section>
-        <p14:section name="보충" id="{c9224688-fec3-1fe5-a79f-e4f7239544b2}">
+        <p14:section name="보충" id="{86a5ac06-9575-800f-4789-b0384afd8918}">
           <p14:sldIdLst>
             <p14:sldId id="269"/>
           </p14:sldIdLst>
@@ -8670,7 +8670,7 @@
         </p:nvSpPr>
         <p:spPr>
           <a:xfrm>
-            <a:off x="548640" y="3424428"/>
+            <a:off x="548640" y="3202940"/>
             <a:ext cx="548640" cy="548640"/>
           </a:xfrm>
           <a:prstGeom prst="ellipse">
@@ -8715,7 +8715,7 @@
         </p:nvSpPr>
         <p:spPr>
           <a:xfrm>
-            <a:off x="1325880" y="3424428"/>
+            <a:off x="1325880" y="3202940"/>
             <a:ext cx="5229271" cy="548640"/>
           </a:xfrm>
           <a:prstGeom prst="rect">
@@ -8754,7 +8754,7 @@
         </p:nvSpPr>
         <p:spPr>
           <a:xfrm>
-            <a:off x="548640" y="4137660"/>
+            <a:off x="548640" y="3961892"/>
             <a:ext cx="548640" cy="548640"/>
           </a:xfrm>
           <a:prstGeom prst="ellipse">
@@ -8799,8 +8799,8 @@
         </p:nvSpPr>
         <p:spPr>
           <a:xfrm>
-            <a:off x="1325880" y="4137660"/>
-            <a:ext cx="5229271" cy="548640"/>
+            <a:off x="1325880" y="3916172"/>
+            <a:ext cx="5229271" cy="991616"/>
           </a:xfrm>
           <a:prstGeom prst="rect">
             <a:avLst/>
@@ -8838,7 +8838,7 @@
         </p:nvSpPr>
         <p:spPr>
           <a:xfrm>
-            <a:off x="548640" y="4850892"/>
+            <a:off x="548640" y="5072380"/>
             <a:ext cx="548640" cy="548640"/>
           </a:xfrm>
           <a:prstGeom prst="ellipse">
@@ -8883,7 +8883,7 @@
         </p:nvSpPr>
         <p:spPr>
           <a:xfrm>
-            <a:off x="1325880" y="4850892"/>
+            <a:off x="1325880" y="5072380"/>
             <a:ext cx="5229271" cy="548640"/>
           </a:xfrm>
           <a:prstGeom prst="rect">
